--- a/classes/parte-4-seguridad-de-aplicaciones-web/104-seguridad-de-oauth-2-0-y-openid-connect/clase-104-presentacion.pptx
+++ b/classes/parte-4-seguridad-de-aplicaciones-web/104-seguridad-de-oauth-2-0-y-openid-connect/clase-104-presentacion.pptx
@@ -17,6 +17,9 @@
     <p:sldId id="265" r:id="rId16"/>
     <p:sldId id="266" r:id="rId17"/>
     <p:sldId id="267" r:id="rId18"/>
+    <p:sldId id="268" r:id="rId19"/>
+    <p:sldId id="269" r:id="rId20"/>
+    <p:sldId id="270" r:id="rId21"/>
   </p:sldIdLst>
   <p:sldSz cx="9144000" cy="6858000" type="screen4x3"/>
   <p:notesSz cx="6858000" cy="9144000"/>
@@ -3198,7 +3201,7 @@
                   <a:srgbClr val="0B3D2E"/>
                 </a:solidFill>
               </a:rPr>
-              <a:t>⚠️ Errores comunes</a:t>
+              <a:t>✍️ Ejercicios</a:t>
             </a:r>
           </a:p>
         </p:txBody>
@@ -3236,67 +3239,82 @@
                   <a:srgbClr val="22282E"/>
                 </a:solidFill>
               </a:rPr>
-              <a:t>•  redirecturi rechazado — Allowlist exacta; el servidor valida bien</a:t>
-            </a:r>
-          </a:p>
-          <a:p>
-            <a:pPr>
-              <a:spcAft>
-                <a:spcPts val="600"/>
-              </a:spcAft>
-            </a:pPr>
-            <a:r>
-              <a:rPr sz="1500">
-                <a:solidFill>
-                  <a:srgbClr val="22282E"/>
-                </a:solidFill>
-              </a:rPr>
-              <a:t>•  No hay code en el callback — Flujo implícito o error de scope; revisa el tipo de flujo</a:t>
-            </a:r>
-          </a:p>
-          <a:p>
-            <a:pPr>
-              <a:spcAft>
-                <a:spcPts val="600"/>
-              </a:spcAft>
-            </a:pPr>
-            <a:r>
-              <a:rPr sz="1500">
-                <a:solidFill>
-                  <a:srgbClr val="22282E"/>
-                </a:solidFill>
-              </a:rPr>
-              <a:t>•  state presente y validado — No hay CSRF; documenta como fortaleza</a:t>
-            </a:r>
-          </a:p>
-          <a:p>
-            <a:pPr>
-              <a:spcAft>
-                <a:spcPts val="600"/>
-              </a:spcAft>
-            </a:pPr>
-            <a:r>
-              <a:rPr sz="1500">
-                <a:solidFill>
-                  <a:srgbClr val="22282E"/>
-                </a:solidFill>
-              </a:rPr>
-              <a:t>•  Token no reutilizable — Expiración/binding correctos</a:t>
-            </a:r>
-          </a:p>
-          <a:p>
-            <a:pPr>
-              <a:spcAft>
-                <a:spcPts val="600"/>
-              </a:spcAft>
-            </a:pPr>
-            <a:r>
-              <a:rPr sz="1500">
-                <a:solidFill>
-                  <a:srgbClr val="22282E"/>
-                </a:solidFill>
-              </a:rPr>
-              <a:t>•  Confundir OAuth con login — OAuth autoriza; para autenticar se usa OIDC</a:t>
+              <a:t>•  Dibuja el flujo Authorization Code con PKCE, parámetro a parámetro.</a:t>
+            </a:r>
+          </a:p>
+          <a:p>
+            <a:pPr>
+              <a:spcAft>
+                <a:spcPts val="600"/>
+              </a:spcAft>
+            </a:pPr>
+            <a:r>
+              <a:rPr sz="1500">
+                <a:solidFill>
+                  <a:srgbClr val="22282E"/>
+                </a:solidFill>
+              </a:rPr>
+              <a:t>•  Explica cómo un redirecturi con validación por prefijo se puede evadir.</a:t>
+            </a:r>
+          </a:p>
+          <a:p>
+            <a:pPr>
+              <a:spcAft>
+                <a:spcPts val="600"/>
+              </a:spcAft>
+            </a:pPr>
+            <a:r>
+              <a:rPr sz="1500">
+                <a:solidFill>
+                  <a:srgbClr val="22282E"/>
+                </a:solidFill>
+              </a:rPr>
+              <a:t>•  Describe un ataque de account hijacking por falta de state.</a:t>
+            </a:r>
+          </a:p>
+          <a:p>
+            <a:pPr>
+              <a:spcAft>
+                <a:spcPts val="600"/>
+              </a:spcAft>
+            </a:pPr>
+            <a:r>
+              <a:rPr sz="1500">
+                <a:solidFill>
+                  <a:srgbClr val="22282E"/>
+                </a:solidFill>
+              </a:rPr>
+              <a:t>•  Diferencia accesstoken, idtoken y refreshtoken.</a:t>
+            </a:r>
+          </a:p>
+          <a:p>
+            <a:pPr>
+              <a:spcAft>
+                <a:spcPts val="600"/>
+              </a:spcAft>
+            </a:pPr>
+            <a:r>
+              <a:rPr sz="1500">
+                <a:solidFill>
+                  <a:srgbClr val="22282E"/>
+                </a:solidFill>
+              </a:rPr>
+              <a:t>•  Explica qué protege PKCE y en qué clientes es imprescindible.</a:t>
+            </a:r>
+          </a:p>
+          <a:p>
+            <a:pPr>
+              <a:spcAft>
+                <a:spcPts val="600"/>
+              </a:spcAft>
+            </a:pPr>
+            <a:r>
+              <a:rPr sz="1500">
+                <a:solidFill>
+                  <a:srgbClr val="22282E"/>
+                </a:solidFill>
+              </a:rPr>
+              <a:t>•  Diseña la validación estricta de redirecturi (allowlist exacta).</a:t>
             </a:r>
           </a:p>
         </p:txBody>
@@ -3347,7 +3365,7 @@
                   <a:srgbClr val="0B3D2E"/>
                 </a:solidFill>
               </a:rPr>
-              <a:t>❓ Preguntas frecuentes</a:t>
+              <a:t>📝 Reto verificable</a:t>
             </a:r>
           </a:p>
         </p:txBody>
@@ -3385,82 +3403,22 @@
                   <a:srgbClr val="22282E"/>
                 </a:solidFill>
               </a:rPr>
-              <a:t>•  ❓ ¿OAuth sirve para login?</a:t>
-            </a:r>
-          </a:p>
-          <a:p>
-            <a:pPr>
-              <a:spcAft>
-                <a:spcPts val="600"/>
-              </a:spcAft>
-            </a:pPr>
-            <a:r>
-              <a:rPr sz="1500">
-                <a:solidFill>
-                  <a:srgbClr val="22282E"/>
-                </a:solidFill>
-              </a:rPr>
-              <a:t>•  OAuth es autorización. Para login federado correcto se usa OIDC, que añade el idtoken con la identidad.</a:t>
-            </a:r>
-          </a:p>
-          <a:p>
-            <a:pPr>
-              <a:spcAft>
-                <a:spcPts val="600"/>
-              </a:spcAft>
-            </a:pPr>
-            <a:r>
-              <a:rPr sz="1500">
-                <a:solidFill>
-                  <a:srgbClr val="22282E"/>
-                </a:solidFill>
-              </a:rPr>
-              <a:t>•  ❓ ¿Por qué el flujo implícito está obsoleto?</a:t>
-            </a:r>
-          </a:p>
-          <a:p>
-            <a:pPr>
-              <a:spcAft>
-                <a:spcPts val="600"/>
-              </a:spcAft>
-            </a:pPr>
-            <a:r>
-              <a:rPr sz="1500">
-                <a:solidFill>
-                  <a:srgbClr val="22282E"/>
-                </a:solidFill>
-              </a:rPr>
-              <a:t>•  Porque expone tokens en la URL. Hoy se recomienda Authorization Code con PKCE.</a:t>
-            </a:r>
-          </a:p>
-          <a:p>
-            <a:pPr>
-              <a:spcAft>
-                <a:spcPts val="600"/>
-              </a:spcAft>
-            </a:pPr>
-            <a:r>
-              <a:rPr sz="1500">
-                <a:solidFill>
-                  <a:srgbClr val="22282E"/>
-                </a:solidFill>
-              </a:rPr>
-              <a:t>•  ❓ ¿Qué es lo más explotado en OAuth?</a:t>
-            </a:r>
-          </a:p>
-          <a:p>
-            <a:pPr>
-              <a:spcAft>
-                <a:spcPts val="600"/>
-              </a:spcAft>
-            </a:pPr>
-            <a:r>
-              <a:rPr sz="1500">
-                <a:solidFill>
-                  <a:srgbClr val="22282E"/>
-                </a:solidFill>
-              </a:rPr>
-              <a:t>•  La validación laxa de redirecturi y la falta de state, que llevan a robo de code y account takeover.</a:t>
+              <a:t>•  Resuelve un lab de OAuth de PortSwigger que explote redirecturi débil o falta de state y consigue tomar la cuenta de otro usuario.</a:t>
+            </a:r>
+          </a:p>
+          <a:p>
+            <a:pPr>
+              <a:spcAft>
+                <a:spcPts val="600"/>
+              </a:spcAft>
+            </a:pPr>
+            <a:r>
+              <a:rPr sz="1500">
+                <a:solidFill>
+                  <a:srgbClr val="22282E"/>
+                </a:solidFill>
+              </a:rPr>
+              <a:t>•  Criterio de aceptación: el lab queda resuelto, documentas el flujo interceptado, el parámetro abusado y la defensa (allowlist de redirect, state obligatorio, PKCE).</a:t>
             </a:r>
           </a:p>
         </p:txBody>
@@ -3511,7 +3469,7 @@
                   <a:srgbClr val="0B3D2E"/>
                 </a:solidFill>
               </a:rPr>
-              <a:t>🔗 Referencias</a:t>
+              <a:t>⚠️ Errores comunes</a:t>
             </a:r>
           </a:p>
         </p:txBody>
@@ -3549,6 +3507,319 @@
                   <a:srgbClr val="22282E"/>
                 </a:solidFill>
               </a:rPr>
+              <a:t>•  redirecturi rechazado — Allowlist exacta; el servidor valida bien</a:t>
+            </a:r>
+          </a:p>
+          <a:p>
+            <a:pPr>
+              <a:spcAft>
+                <a:spcPts val="600"/>
+              </a:spcAft>
+            </a:pPr>
+            <a:r>
+              <a:rPr sz="1500">
+                <a:solidFill>
+                  <a:srgbClr val="22282E"/>
+                </a:solidFill>
+              </a:rPr>
+              <a:t>•  No hay code en el callback — Flujo implícito o error de scope; revisa el tipo de flujo</a:t>
+            </a:r>
+          </a:p>
+          <a:p>
+            <a:pPr>
+              <a:spcAft>
+                <a:spcPts val="600"/>
+              </a:spcAft>
+            </a:pPr>
+            <a:r>
+              <a:rPr sz="1500">
+                <a:solidFill>
+                  <a:srgbClr val="22282E"/>
+                </a:solidFill>
+              </a:rPr>
+              <a:t>•  state presente y validado — No hay CSRF; documenta como fortaleza</a:t>
+            </a:r>
+          </a:p>
+          <a:p>
+            <a:pPr>
+              <a:spcAft>
+                <a:spcPts val="600"/>
+              </a:spcAft>
+            </a:pPr>
+            <a:r>
+              <a:rPr sz="1500">
+                <a:solidFill>
+                  <a:srgbClr val="22282E"/>
+                </a:solidFill>
+              </a:rPr>
+              <a:t>•  Token no reutilizable — Expiración/binding correctos</a:t>
+            </a:r>
+          </a:p>
+          <a:p>
+            <a:pPr>
+              <a:spcAft>
+                <a:spcPts val="600"/>
+              </a:spcAft>
+            </a:pPr>
+            <a:r>
+              <a:rPr sz="1500">
+                <a:solidFill>
+                  <a:srgbClr val="22282E"/>
+                </a:solidFill>
+              </a:rPr>
+              <a:t>•  Confundir OAuth con login — OAuth autoriza; para autenticar se usa OIDC</a:t>
+            </a:r>
+          </a:p>
+        </p:txBody>
+      </p:sp>
+    </p:spTree>
+  </p:cSld>
+  <p:clrMapOvr>
+    <a:masterClrMapping/>
+  </p:clrMapOvr>
+</p:sld>
+</file>
+
+<file path=ppt/slides/slide13.xml><?xml version="1.0" encoding="utf-8"?>
+<p:sld xmlns:a="http://schemas.openxmlformats.org/drawingml/2006/main" xmlns:p="http://schemas.openxmlformats.org/presentationml/2006/main" xmlns:r="http://schemas.openxmlformats.org/officeDocument/2006/relationships">
+  <p:cSld>
+    <p:spTree>
+      <p:nvGrpSpPr>
+        <p:cNvPr id="1" name=""/>
+        <p:cNvGrpSpPr/>
+        <p:nvPr/>
+      </p:nvGrpSpPr>
+      <p:grpSpPr/>
+      <p:sp>
+        <p:nvSpPr>
+          <p:cNvPr id="2" name="TextBox 1"/>
+          <p:cNvSpPr txBox="1"/>
+          <p:nvPr/>
+        </p:nvSpPr>
+        <p:spPr>
+          <a:xfrm>
+            <a:off x="457200" y="320040"/>
+            <a:ext cx="8229600" cy="822960"/>
+          </a:xfrm>
+          <a:prstGeom prst="rect">
+            <a:avLst/>
+          </a:prstGeom>
+          <a:noFill/>
+        </p:spPr>
+        <p:txBody>
+          <a:bodyPr wrap="square">
+            <a:spAutoFit/>
+          </a:bodyPr>
+          <a:lstStyle/>
+          <a:p>
+            <a:r>
+              <a:rPr sz="2600" b="1">
+                <a:solidFill>
+                  <a:srgbClr val="0B3D2E"/>
+                </a:solidFill>
+              </a:rPr>
+              <a:t>❓ Preguntas frecuentes</a:t>
+            </a:r>
+          </a:p>
+        </p:txBody>
+      </p:sp>
+      <p:sp>
+        <p:nvSpPr>
+          <p:cNvPr id="3" name="TextBox 2"/>
+          <p:cNvSpPr txBox="1"/>
+          <p:nvPr/>
+        </p:nvSpPr>
+        <p:spPr>
+          <a:xfrm>
+            <a:off x="457200" y="1280160"/>
+            <a:ext cx="8229600" cy="4937760"/>
+          </a:xfrm>
+          <a:prstGeom prst="rect">
+            <a:avLst/>
+          </a:prstGeom>
+          <a:noFill/>
+        </p:spPr>
+        <p:txBody>
+          <a:bodyPr wrap="square">
+            <a:spAutoFit/>
+          </a:bodyPr>
+          <a:lstStyle/>
+          <a:p>
+            <a:pPr>
+              <a:spcAft>
+                <a:spcPts val="600"/>
+              </a:spcAft>
+            </a:pPr>
+            <a:r>
+              <a:rPr sz="1500">
+                <a:solidFill>
+                  <a:srgbClr val="22282E"/>
+                </a:solidFill>
+              </a:rPr>
+              <a:t>•  ❓ ¿OAuth sirve para login?</a:t>
+            </a:r>
+          </a:p>
+          <a:p>
+            <a:pPr>
+              <a:spcAft>
+                <a:spcPts val="600"/>
+              </a:spcAft>
+            </a:pPr>
+            <a:r>
+              <a:rPr sz="1500">
+                <a:solidFill>
+                  <a:srgbClr val="22282E"/>
+                </a:solidFill>
+              </a:rPr>
+              <a:t>•  OAuth es autorización. Para login federado correcto se usa OIDC, que añade el idtoken con la identidad.</a:t>
+            </a:r>
+          </a:p>
+          <a:p>
+            <a:pPr>
+              <a:spcAft>
+                <a:spcPts val="600"/>
+              </a:spcAft>
+            </a:pPr>
+            <a:r>
+              <a:rPr sz="1500">
+                <a:solidFill>
+                  <a:srgbClr val="22282E"/>
+                </a:solidFill>
+              </a:rPr>
+              <a:t>•  ❓ ¿Por qué el flujo implícito está obsoleto?</a:t>
+            </a:r>
+          </a:p>
+          <a:p>
+            <a:pPr>
+              <a:spcAft>
+                <a:spcPts val="600"/>
+              </a:spcAft>
+            </a:pPr>
+            <a:r>
+              <a:rPr sz="1500">
+                <a:solidFill>
+                  <a:srgbClr val="22282E"/>
+                </a:solidFill>
+              </a:rPr>
+              <a:t>•  Porque expone tokens en la URL. Hoy se recomienda Authorization Code con PKCE.</a:t>
+            </a:r>
+          </a:p>
+          <a:p>
+            <a:pPr>
+              <a:spcAft>
+                <a:spcPts val="600"/>
+              </a:spcAft>
+            </a:pPr>
+            <a:r>
+              <a:rPr sz="1500">
+                <a:solidFill>
+                  <a:srgbClr val="22282E"/>
+                </a:solidFill>
+              </a:rPr>
+              <a:t>•  ❓ ¿Qué es lo más explotado en OAuth?</a:t>
+            </a:r>
+          </a:p>
+          <a:p>
+            <a:pPr>
+              <a:spcAft>
+                <a:spcPts val="600"/>
+              </a:spcAft>
+            </a:pPr>
+            <a:r>
+              <a:rPr sz="1500">
+                <a:solidFill>
+                  <a:srgbClr val="22282E"/>
+                </a:solidFill>
+              </a:rPr>
+              <a:t>•  La validación laxa de redirecturi y la falta de state, que llevan a robo de code y account takeover.</a:t>
+            </a:r>
+          </a:p>
+        </p:txBody>
+      </p:sp>
+    </p:spTree>
+  </p:cSld>
+  <p:clrMapOvr>
+    <a:masterClrMapping/>
+  </p:clrMapOvr>
+</p:sld>
+</file>
+
+<file path=ppt/slides/slide14.xml><?xml version="1.0" encoding="utf-8"?>
+<p:sld xmlns:a="http://schemas.openxmlformats.org/drawingml/2006/main" xmlns:p="http://schemas.openxmlformats.org/presentationml/2006/main" xmlns:r="http://schemas.openxmlformats.org/officeDocument/2006/relationships">
+  <p:cSld>
+    <p:spTree>
+      <p:nvGrpSpPr>
+        <p:cNvPr id="1" name=""/>
+        <p:cNvGrpSpPr/>
+        <p:nvPr/>
+      </p:nvGrpSpPr>
+      <p:grpSpPr/>
+      <p:sp>
+        <p:nvSpPr>
+          <p:cNvPr id="2" name="TextBox 1"/>
+          <p:cNvSpPr txBox="1"/>
+          <p:nvPr/>
+        </p:nvSpPr>
+        <p:spPr>
+          <a:xfrm>
+            <a:off x="457200" y="320040"/>
+            <a:ext cx="8229600" cy="822960"/>
+          </a:xfrm>
+          <a:prstGeom prst="rect">
+            <a:avLst/>
+          </a:prstGeom>
+          <a:noFill/>
+        </p:spPr>
+        <p:txBody>
+          <a:bodyPr wrap="square">
+            <a:spAutoFit/>
+          </a:bodyPr>
+          <a:lstStyle/>
+          <a:p>
+            <a:r>
+              <a:rPr sz="2600" b="1">
+                <a:solidFill>
+                  <a:srgbClr val="0B3D2E"/>
+                </a:solidFill>
+              </a:rPr>
+              <a:t>🔗 Referencias</a:t>
+            </a:r>
+          </a:p>
+        </p:txBody>
+      </p:sp>
+      <p:sp>
+        <p:nvSpPr>
+          <p:cNvPr id="3" name="TextBox 2"/>
+          <p:cNvSpPr txBox="1"/>
+          <p:nvPr/>
+        </p:nvSpPr>
+        <p:spPr>
+          <a:xfrm>
+            <a:off x="457200" y="1280160"/>
+            <a:ext cx="8229600" cy="4937760"/>
+          </a:xfrm>
+          <a:prstGeom prst="rect">
+            <a:avLst/>
+          </a:prstGeom>
+          <a:noFill/>
+        </p:spPr>
+        <p:txBody>
+          <a:bodyPr wrap="square">
+            <a:spAutoFit/>
+          </a:bodyPr>
+          <a:lstStyle/>
+          <a:p>
+            <a:pPr>
+              <a:spcAft>
+                <a:spcPts val="600"/>
+              </a:spcAft>
+            </a:pPr>
+            <a:r>
+              <a:rPr sz="1500">
+                <a:solidFill>
+                  <a:srgbClr val="22282E"/>
+                </a:solidFill>
+              </a:rPr>
               <a:t>•  Li, Bug Bounty Bootcamp, sección de OAuth.</a:t>
             </a:r>
           </a:p>
@@ -3599,6 +3870,81 @@
           </a:p>
         </p:txBody>
       </p:sp>
+    </p:spTree>
+  </p:cSld>
+  <p:clrMapOvr>
+    <a:masterClrMapping/>
+  </p:clrMapOvr>
+</p:sld>
+</file>
+
+<file path=ppt/slides/slide15.xml><?xml version="1.0" encoding="utf-8"?>
+<p:sld xmlns:a="http://schemas.openxmlformats.org/drawingml/2006/main" xmlns:p="http://schemas.openxmlformats.org/presentationml/2006/main" xmlns:r="http://schemas.openxmlformats.org/officeDocument/2006/relationships">
+  <p:cSld>
+    <p:spTree>
+      <p:nvGrpSpPr>
+        <p:cNvPr id="1" name=""/>
+        <p:cNvGrpSpPr/>
+        <p:nvPr/>
+      </p:nvGrpSpPr>
+      <p:grpSpPr/>
+      <p:sp>
+        <p:nvSpPr>
+          <p:cNvPr id="2" name="TextBox 1"/>
+          <p:cNvSpPr txBox="1"/>
+          <p:nvPr/>
+        </p:nvSpPr>
+        <p:spPr>
+          <a:xfrm>
+            <a:off x="457200" y="274320"/>
+            <a:ext cx="8229600" cy="640080"/>
+          </a:xfrm>
+          <a:prstGeom prst="rect">
+            <a:avLst/>
+          </a:prstGeom>
+          <a:noFill/>
+        </p:spPr>
+        <p:txBody>
+          <a:bodyPr wrap="square">
+            <a:spAutoFit/>
+          </a:bodyPr>
+          <a:lstStyle/>
+          <a:p>
+            <a:r>
+              <a:rPr sz="2200" b="1">
+                <a:solidFill>
+                  <a:srgbClr val="0B3D2E"/>
+                </a:solidFill>
+              </a:rPr>
+              <a:t>Diagrama de la clase</a:t>
+            </a:r>
+          </a:p>
+        </p:txBody>
+      </p:sp>
+      <p:pic>
+        <p:nvPicPr>
+          <p:cNvPr id="3" name="Picture 2" descr="c806053b1a881e63.png"/>
+          <p:cNvPicPr>
+            <a:picLocks noChangeAspect="1"/>
+          </p:cNvPicPr>
+          <p:nvPr/>
+        </p:nvPicPr>
+        <p:blipFill>
+          <a:blip r:embed="rId2"/>
+          <a:stretch>
+            <a:fillRect/>
+          </a:stretch>
+        </p:blipFill>
+        <p:spPr>
+          <a:xfrm>
+            <a:off x="614996" y="1097280"/>
+            <a:ext cx="7914007" cy="5303520"/>
+          </a:xfrm>
+          <a:prstGeom prst="rect">
+            <a:avLst/>
+          </a:prstGeom>
+        </p:spPr>
+      </p:pic>
     </p:spTree>
   </p:cSld>
   <p:clrMapOvr>
@@ -3683,7 +4029,7 @@
                   <a:srgbClr val="22282E"/>
                 </a:solidFill>
               </a:rPr>
-              <a:t>•  Comprender y auditar OAuth 2.0 y OpenID Connect (OIDC), la base del "login con Google/GitHub" y de la delegación de acceso en APIs. Verás los flujos, sus piezas y los ataques clásicos: redirecturi laxo, robo de code, CSRF por falta de state y confusión de tokens.</a:t>
+              <a:t>•  Comprender y auditar OAuth 2.0 y OpenID Connect (OIDC), la base del "login con Google/GitHub" y de la delegación de acceso en APIs. Verás los flujos, sus piezas y los ataques clásicos: redirecturi…</a:t>
             </a:r>
           </a:p>
         </p:txBody>
@@ -4077,7 +4423,7 @@
                   <a:srgbClr val="0B3D2E"/>
                 </a:solidFill>
               </a:rPr>
-              <a:t>📖 Definiciones y características</a:t>
+              <a:t>🧠 Explicación en profundidad</a:t>
             </a:r>
           </a:p>
         </p:txBody>
@@ -4115,82 +4461,97 @@
                   <a:srgbClr val="22282E"/>
                 </a:solidFill>
               </a:rPr>
-              <a:t>•  OAuth 2.0: marco de delegación de acceso a recursos sin compartir credenciales. Característica: autorización, no autenticación.</a:t>
-            </a:r>
-          </a:p>
-          <a:p>
-            <a:pPr>
-              <a:spcAft>
-                <a:spcPts val="600"/>
-              </a:spcAft>
-            </a:pPr>
-            <a:r>
-              <a:rPr sz="1500">
-                <a:solidFill>
-                  <a:srgbClr val="22282E"/>
-                </a:solidFill>
-              </a:rPr>
-              <a:t>•  OIDC: capa de identidad sobre OAuth que añade el idtoken. Característica: sí autentica al usuario.</a:t>
-            </a:r>
-          </a:p>
-          <a:p>
-            <a:pPr>
-              <a:spcAft>
-                <a:spcPts val="600"/>
-              </a:spcAft>
-            </a:pPr>
-            <a:r>
-              <a:rPr sz="1500">
-                <a:solidFill>
-                  <a:srgbClr val="22282E"/>
-                </a:solidFill>
-              </a:rPr>
-              <a:t>•  Authorization Code: código temporal que se intercambia por tokens. Característica: no debe filtrarse.</a:t>
-            </a:r>
-          </a:p>
-          <a:p>
-            <a:pPr>
-              <a:spcAft>
-                <a:spcPts val="600"/>
-              </a:spcAft>
-            </a:pPr>
-            <a:r>
-              <a:rPr sz="1500">
-                <a:solidFill>
-                  <a:srgbClr val="22282E"/>
-                </a:solidFill>
-              </a:rPr>
-              <a:t>•  redirecturi: URL a la que vuelve el flujo. Característica: si se valida laxamente, se roba el code.</a:t>
-            </a:r>
-          </a:p>
-          <a:p>
-            <a:pPr>
-              <a:spcAft>
-                <a:spcPts val="600"/>
-              </a:spcAft>
-            </a:pPr>
-            <a:r>
-              <a:rPr sz="1500">
-                <a:solidFill>
-                  <a:srgbClr val="22282E"/>
-                </a:solidFill>
-              </a:rPr>
-              <a:t>•  state: valor anti-CSRF que liga la petición y la respuesta. Característica: su ausencia habilita account hijacking.</a:t>
-            </a:r>
-          </a:p>
-          <a:p>
-            <a:pPr>
-              <a:spcAft>
-                <a:spcPts val="600"/>
-              </a:spcAft>
-            </a:pPr>
-            <a:r>
-              <a:rPr sz="1500">
-                <a:solidFill>
-                  <a:srgbClr val="22282E"/>
-                </a:solidFill>
-              </a:rPr>
-              <a:t>•  PKCE: extensión que protege el intercambio de code en clientes públicos. Característica: evita el robo de code por apps maliciosas.</a:t>
+              <a:t>•  OAuth 2.0 resuelve un problema concreto: permitir que una aplicación acceda a tus datos en otro</a:t>
+            </a:r>
+          </a:p>
+          <a:p>
+            <a:pPr>
+              <a:spcAft>
+                <a:spcPts val="600"/>
+              </a:spcAft>
+            </a:pPr>
+            <a:r>
+              <a:rPr sz="1500">
+                <a:solidFill>
+                  <a:srgbClr val="22282E"/>
+                </a:solidFill>
+              </a:rPr>
+              <a:t>•  servicio sin darle tu contraseña. Cuando "inicias sesión con Google" o autorizas a una app a leer</a:t>
+            </a:r>
+          </a:p>
+          <a:p>
+            <a:pPr>
+              <a:spcAft>
+                <a:spcPts val="600"/>
+              </a:spcAft>
+            </a:pPr>
+            <a:r>
+              <a:rPr sz="1500">
+                <a:solidFill>
+                  <a:srgbClr val="22282E"/>
+                </a:solidFill>
+              </a:rPr>
+              <a:t>•  tu calendario, es OAuth. Sus cuatro roles hay que tenerlos claros porque los ataques se explican en</a:t>
+            </a:r>
+          </a:p>
+          <a:p>
+            <a:pPr>
+              <a:spcAft>
+                <a:spcPts val="600"/>
+              </a:spcAft>
+            </a:pPr>
+            <a:r>
+              <a:rPr sz="1500">
+                <a:solidFill>
+                  <a:srgbClr val="22282E"/>
+                </a:solidFill>
+              </a:rPr>
+              <a:t>•  términos de ellos: el resource owner (tú, el usuario), el client (la aplicación que quiere</a:t>
+            </a:r>
+          </a:p>
+          <a:p>
+            <a:pPr>
+              <a:spcAft>
+                <a:spcPts val="600"/>
+              </a:spcAft>
+            </a:pPr>
+            <a:r>
+              <a:rPr sz="1500">
+                <a:solidFill>
+                  <a:srgbClr val="22282E"/>
+                </a:solidFill>
+              </a:rPr>
+              <a:t>•  acceso), el authorization server (quien autentica y emite tokens, p. ej. Google) y el resource</a:t>
+            </a:r>
+          </a:p>
+          <a:p>
+            <a:pPr>
+              <a:spcAft>
+                <a:spcPts val="600"/>
+              </a:spcAft>
+            </a:pPr>
+            <a:r>
+              <a:rPr sz="1500">
+                <a:solidFill>
+                  <a:srgbClr val="22282E"/>
+                </a:solidFill>
+              </a:rPr>
+              <a:t>•  server (donde están los datos). Una distinción esencial que causa la mitad de los fallos: OAuth</a:t>
+            </a:r>
+          </a:p>
+          <a:p>
+            <a:pPr>
+              <a:spcAft>
+                <a:spcPts val="600"/>
+              </a:spcAft>
+            </a:pPr>
+            <a:r>
+              <a:rPr sz="1500">
+                <a:solidFill>
+                  <a:srgbClr val="22282E"/>
+                </a:solidFill>
+              </a:rPr>
+              <a:t>•  es para autorización (dar acceso a recursos), no para autenticación (probar quién eres); usarlo</a:t>
             </a:r>
           </a:p>
         </p:txBody>
@@ -4241,7 +4602,7 @@
                   <a:srgbClr val="0B3D2E"/>
                 </a:solidFill>
               </a:rPr>
-              <a:t>🧰 Herramientas y preparación</a:t>
+              <a:t>📖 Definiciones y características</a:t>
             </a:r>
           </a:p>
         </p:txBody>
@@ -4279,37 +4640,82 @@
                   <a:srgbClr val="22282E"/>
                 </a:solidFill>
               </a:rPr>
-              <a:t>•  PortSwigger labs de OAuth.</a:t>
-            </a:r>
-          </a:p>
-          <a:p>
-            <a:pPr>
-              <a:spcAft>
-                <a:spcPts val="600"/>
-              </a:spcAft>
-            </a:pPr>
-            <a:r>
-              <a:rPr sz="1500">
-                <a:solidFill>
-                  <a:srgbClr val="22282E"/>
-                </a:solidFill>
-              </a:rPr>
-              <a:t>•  Burp para interceptar el flujo (autorización, callback, intercambio).</a:t>
-            </a:r>
-          </a:p>
-          <a:p>
-            <a:pPr>
-              <a:spcAft>
-                <a:spcPts val="600"/>
-              </a:spcAft>
-            </a:pPr>
-            <a:r>
-              <a:rPr sz="1500">
-                <a:solidFill>
-                  <a:srgbClr val="22282E"/>
-                </a:solidFill>
-              </a:rPr>
-              <a:t>•  Un proveedor de identidad de laboratorio o el simulado por el lab.</a:t>
+              <a:t>•  OAuth 2.0: marco de delegación de acceso a recursos sin compartir credenciales. Característica: autorización, no autenticación.</a:t>
+            </a:r>
+          </a:p>
+          <a:p>
+            <a:pPr>
+              <a:spcAft>
+                <a:spcPts val="600"/>
+              </a:spcAft>
+            </a:pPr>
+            <a:r>
+              <a:rPr sz="1500">
+                <a:solidFill>
+                  <a:srgbClr val="22282E"/>
+                </a:solidFill>
+              </a:rPr>
+              <a:t>•  OIDC: capa de identidad sobre OAuth que añade el idtoken. Característica: sí autentica al usuario.</a:t>
+            </a:r>
+          </a:p>
+          <a:p>
+            <a:pPr>
+              <a:spcAft>
+                <a:spcPts val="600"/>
+              </a:spcAft>
+            </a:pPr>
+            <a:r>
+              <a:rPr sz="1500">
+                <a:solidFill>
+                  <a:srgbClr val="22282E"/>
+                </a:solidFill>
+              </a:rPr>
+              <a:t>•  Authorization Code: código temporal que se intercambia por tokens. Característica: no debe filtrarse.</a:t>
+            </a:r>
+          </a:p>
+          <a:p>
+            <a:pPr>
+              <a:spcAft>
+                <a:spcPts val="600"/>
+              </a:spcAft>
+            </a:pPr>
+            <a:r>
+              <a:rPr sz="1500">
+                <a:solidFill>
+                  <a:srgbClr val="22282E"/>
+                </a:solidFill>
+              </a:rPr>
+              <a:t>•  redirecturi: URL a la que vuelve el flujo. Característica: si se valida laxamente, se roba el code.</a:t>
+            </a:r>
+          </a:p>
+          <a:p>
+            <a:pPr>
+              <a:spcAft>
+                <a:spcPts val="600"/>
+              </a:spcAft>
+            </a:pPr>
+            <a:r>
+              <a:rPr sz="1500">
+                <a:solidFill>
+                  <a:srgbClr val="22282E"/>
+                </a:solidFill>
+              </a:rPr>
+              <a:t>•  state: valor anti-CSRF que liga la petición y la respuesta. Característica: su ausencia habilita account hijacking.</a:t>
+            </a:r>
+          </a:p>
+          <a:p>
+            <a:pPr>
+              <a:spcAft>
+                <a:spcPts val="600"/>
+              </a:spcAft>
+            </a:pPr>
+            <a:r>
+              <a:rPr sz="1500">
+                <a:solidFill>
+                  <a:srgbClr val="22282E"/>
+                </a:solidFill>
+              </a:rPr>
+              <a:t>•  PKCE: extensión que protege el intercambio de code en clientes públicos. Característica: evita el robo de code por apps maliciosas.</a:t>
             </a:r>
           </a:p>
         </p:txBody>
@@ -4360,7 +4766,7 @@
                   <a:srgbClr val="0B3D2E"/>
                 </a:solidFill>
               </a:rPr>
-              <a:t>🧪 Laboratorio guiado</a:t>
+              <a:t>📔 Glosario</a:t>
             </a:r>
           </a:p>
         </p:txBody>
@@ -4398,97 +4804,97 @@
                   <a:srgbClr val="22282E"/>
                 </a:solidFill>
               </a:rPr>
-              <a:t>•  Intercepta el flujo completo con Burp: /authorize → consentimiento → redirecturi?code=... → intercambio de token.</a:t>
-            </a:r>
-          </a:p>
-          <a:p>
-            <a:pPr>
-              <a:spcAft>
-                <a:spcPts val="600"/>
-              </a:spcAft>
-            </a:pPr>
-            <a:r>
-              <a:rPr sz="1500">
-                <a:solidFill>
-                  <a:srgbClr val="22282E"/>
-                </a:solidFill>
-              </a:rPr>
-              <a:t>•  Modifica el redirecturi a un dominio controlado y observa si el servidor lo acepta (validación laxa).</a:t>
-            </a:r>
-          </a:p>
-          <a:p>
-            <a:pPr>
-              <a:spcAft>
-                <a:spcPts val="600"/>
-              </a:spcAft>
-            </a:pPr>
-            <a:r>
-              <a:rPr sz="1500">
-                <a:solidFill>
-                  <a:srgbClr val="22282E"/>
-                </a:solidFill>
-              </a:rPr>
-              <a:t>•  Si lo acepta, captura el code enviado a tu dominio y complétalo por un token.</a:t>
-            </a:r>
-          </a:p>
-          <a:p>
-            <a:pPr>
-              <a:spcAft>
-                <a:spcPts val="600"/>
-              </a:spcAft>
-            </a:pPr>
-            <a:r>
-              <a:rPr sz="1500">
-                <a:solidFill>
-                  <a:srgbClr val="22282E"/>
-                </a:solidFill>
-              </a:rPr>
-              <a:t>•  Comprueba la presencia del parámetro state; si falta, monta un CSRF que vincule la cuenta del atacante.</a:t>
-            </a:r>
-          </a:p>
-          <a:p>
-            <a:pPr>
-              <a:spcAft>
-                <a:spcPts val="600"/>
-              </a:spcAft>
-            </a:pPr>
-            <a:r>
-              <a:rPr sz="1500">
-                <a:solidFill>
-                  <a:srgbClr val="22282E"/>
-                </a:solidFill>
-              </a:rPr>
-              <a:t>•  Analiza los scopes solicitados: ¿se puede pedir más de lo autorizado?</a:t>
-            </a:r>
-          </a:p>
-          <a:p>
-            <a:pPr>
-              <a:spcAft>
-                <a:spcPts val="600"/>
-              </a:spcAft>
-            </a:pPr>
-            <a:r>
-              <a:rPr sz="1500">
-                <a:solidFill>
-                  <a:srgbClr val="22282E"/>
-                </a:solidFill>
-              </a:rPr>
-              <a:t>•  En OIDC, inspecciona el idtoken (es un JWT): aplica lo aprendido en la clase 103.</a:t>
-            </a:r>
-          </a:p>
-          <a:p>
-            <a:pPr>
-              <a:spcAft>
-                <a:spcPts val="600"/>
-              </a:spcAft>
-            </a:pPr>
-            <a:r>
-              <a:rPr sz="1500">
-                <a:solidFill>
-                  <a:srgbClr val="22282E"/>
-                </a:solidFill>
-              </a:rPr>
-              <a:t>•  Documenta el flujo, el fallo y el impacto (account takeover).</a:t>
+              <a:t>•  Término — Definición concisa</a:t>
+            </a:r>
+          </a:p>
+          <a:p>
+            <a:pPr>
+              <a:spcAft>
+                <a:spcPts val="600"/>
+              </a:spcAft>
+            </a:pPr>
+            <a:r>
+              <a:rPr sz="1500">
+                <a:solidFill>
+                  <a:srgbClr val="22282E"/>
+                </a:solidFill>
+              </a:rPr>
+              <a:t>•  OAuth 2.0 — Delegar acceso a recursos sin entregar la contraseña</a:t>
+            </a:r>
+          </a:p>
+          <a:p>
+            <a:pPr>
+              <a:spcAft>
+                <a:spcPts val="600"/>
+              </a:spcAft>
+            </a:pPr>
+            <a:r>
+              <a:rPr sz="1500">
+                <a:solidFill>
+                  <a:srgbClr val="22282E"/>
+                </a:solidFill>
+              </a:rPr>
+              <a:t>•  Resource owner — El usuario dueño de los datos</a:t>
+            </a:r>
+          </a:p>
+          <a:p>
+            <a:pPr>
+              <a:spcAft>
+                <a:spcPts val="600"/>
+              </a:spcAft>
+            </a:pPr>
+            <a:r>
+              <a:rPr sz="1500">
+                <a:solidFill>
+                  <a:srgbClr val="22282E"/>
+                </a:solidFill>
+              </a:rPr>
+              <a:t>•  Client — La aplicación que solicita acceso</a:t>
+            </a:r>
+          </a:p>
+          <a:p>
+            <a:pPr>
+              <a:spcAft>
+                <a:spcPts val="600"/>
+              </a:spcAft>
+            </a:pPr>
+            <a:r>
+              <a:rPr sz="1500">
+                <a:solidFill>
+                  <a:srgbClr val="22282E"/>
+                </a:solidFill>
+              </a:rPr>
+              <a:t>•  Authorization server — Autentica y emite tokens</a:t>
+            </a:r>
+          </a:p>
+          <a:p>
+            <a:pPr>
+              <a:spcAft>
+                <a:spcPts val="600"/>
+              </a:spcAft>
+            </a:pPr>
+            <a:r>
+              <a:rPr sz="1500">
+                <a:solidFill>
+                  <a:srgbClr val="22282E"/>
+                </a:solidFill>
+              </a:rPr>
+              <a:t>•  Resource server — Donde están los datos protegidos</a:t>
+            </a:r>
+          </a:p>
+          <a:p>
+            <a:pPr>
+              <a:spcAft>
+                <a:spcPts val="600"/>
+              </a:spcAft>
+            </a:pPr>
+            <a:r>
+              <a:rPr sz="1500">
+                <a:solidFill>
+                  <a:srgbClr val="22282E"/>
+                </a:solidFill>
+              </a:rPr>
+              <a:t>•  Autorización ≠ autenticación — OAuth da acceso; no prueba identidad por sí solo</a:t>
             </a:r>
           </a:p>
         </p:txBody>
@@ -4539,7 +4945,7 @@
                   <a:srgbClr val="0B3D2E"/>
                 </a:solidFill>
               </a:rPr>
-              <a:t>✍️ Ejercicios</a:t>
+              <a:t>🧰 Herramientas y preparación</a:t>
             </a:r>
           </a:p>
         </p:txBody>
@@ -4577,82 +4983,37 @@
                   <a:srgbClr val="22282E"/>
                 </a:solidFill>
               </a:rPr>
-              <a:t>•  Dibuja el flujo Authorization Code con PKCE, parámetro a parámetro.</a:t>
-            </a:r>
-          </a:p>
-          <a:p>
-            <a:pPr>
-              <a:spcAft>
-                <a:spcPts val="600"/>
-              </a:spcAft>
-            </a:pPr>
-            <a:r>
-              <a:rPr sz="1500">
-                <a:solidFill>
-                  <a:srgbClr val="22282E"/>
-                </a:solidFill>
-              </a:rPr>
-              <a:t>•  Explica cómo un redirecturi con validación por prefijo se puede evadir.</a:t>
-            </a:r>
-          </a:p>
-          <a:p>
-            <a:pPr>
-              <a:spcAft>
-                <a:spcPts val="600"/>
-              </a:spcAft>
-            </a:pPr>
-            <a:r>
-              <a:rPr sz="1500">
-                <a:solidFill>
-                  <a:srgbClr val="22282E"/>
-                </a:solidFill>
-              </a:rPr>
-              <a:t>•  Describe un ataque de account hijacking por falta de state.</a:t>
-            </a:r>
-          </a:p>
-          <a:p>
-            <a:pPr>
-              <a:spcAft>
-                <a:spcPts val="600"/>
-              </a:spcAft>
-            </a:pPr>
-            <a:r>
-              <a:rPr sz="1500">
-                <a:solidFill>
-                  <a:srgbClr val="22282E"/>
-                </a:solidFill>
-              </a:rPr>
-              <a:t>•  Diferencia accesstoken, idtoken y refreshtoken.</a:t>
-            </a:r>
-          </a:p>
-          <a:p>
-            <a:pPr>
-              <a:spcAft>
-                <a:spcPts val="600"/>
-              </a:spcAft>
-            </a:pPr>
-            <a:r>
-              <a:rPr sz="1500">
-                <a:solidFill>
-                  <a:srgbClr val="22282E"/>
-                </a:solidFill>
-              </a:rPr>
-              <a:t>•  Explica qué protege PKCE y en qué clientes es imprescindible.</a:t>
-            </a:r>
-          </a:p>
-          <a:p>
-            <a:pPr>
-              <a:spcAft>
-                <a:spcPts val="600"/>
-              </a:spcAft>
-            </a:pPr>
-            <a:r>
-              <a:rPr sz="1500">
-                <a:solidFill>
-                  <a:srgbClr val="22282E"/>
-                </a:solidFill>
-              </a:rPr>
-              <a:t>•  Diseña la validación estricta de redirecturi (allowlist exacta).</a:t>
+              <a:t>•  PortSwigger labs de OAuth.</a:t>
+            </a:r>
+          </a:p>
+          <a:p>
+            <a:pPr>
+              <a:spcAft>
+                <a:spcPts val="600"/>
+              </a:spcAft>
+            </a:pPr>
+            <a:r>
+              <a:rPr sz="1500">
+                <a:solidFill>
+                  <a:srgbClr val="22282E"/>
+                </a:solidFill>
+              </a:rPr>
+              <a:t>•  Burp para interceptar el flujo (autorización, callback, intercambio).</a:t>
+            </a:r>
+          </a:p>
+          <a:p>
+            <a:pPr>
+              <a:spcAft>
+                <a:spcPts val="600"/>
+              </a:spcAft>
+            </a:pPr>
+            <a:r>
+              <a:rPr sz="1500">
+                <a:solidFill>
+                  <a:srgbClr val="22282E"/>
+                </a:solidFill>
+              </a:rPr>
+              <a:t>•  Un proveedor de identidad de laboratorio o el simulado por el lab.</a:t>
             </a:r>
           </a:p>
         </p:txBody>
@@ -4703,7 +5064,7 @@
                   <a:srgbClr val="0B3D2E"/>
                 </a:solidFill>
               </a:rPr>
-              <a:t>📝 Reto verificable</a:t>
+              <a:t>🧪 Laboratorio guiado</a:t>
             </a:r>
           </a:p>
         </p:txBody>
@@ -4741,22 +5102,97 @@
                   <a:srgbClr val="22282E"/>
                 </a:solidFill>
               </a:rPr>
-              <a:t>•  Resuelve un lab de OAuth de PortSwigger que explote redirecturi débil o falta de state y consigue tomar la cuenta de otro usuario.</a:t>
-            </a:r>
-          </a:p>
-          <a:p>
-            <a:pPr>
-              <a:spcAft>
-                <a:spcPts val="600"/>
-              </a:spcAft>
-            </a:pPr>
-            <a:r>
-              <a:rPr sz="1500">
-                <a:solidFill>
-                  <a:srgbClr val="22282E"/>
-                </a:solidFill>
-              </a:rPr>
-              <a:t>•  Criterio de aceptación: el lab queda resuelto, documentas el flujo interceptado, el parámetro abusado y la defensa (allowlist de redirect, state obligatorio, PKCE).</a:t>
+              <a:t>•  Intercepta el flujo completo con Burp: /authorize → consentimiento → redirecturi?code=... → intercambio de token.</a:t>
+            </a:r>
+          </a:p>
+          <a:p>
+            <a:pPr>
+              <a:spcAft>
+                <a:spcPts val="600"/>
+              </a:spcAft>
+            </a:pPr>
+            <a:r>
+              <a:rPr sz="1500">
+                <a:solidFill>
+                  <a:srgbClr val="22282E"/>
+                </a:solidFill>
+              </a:rPr>
+              <a:t>•  Modifica el redirecturi a un dominio controlado y observa si el servidor lo acepta (validación laxa).</a:t>
+            </a:r>
+          </a:p>
+          <a:p>
+            <a:pPr>
+              <a:spcAft>
+                <a:spcPts val="600"/>
+              </a:spcAft>
+            </a:pPr>
+            <a:r>
+              <a:rPr sz="1500">
+                <a:solidFill>
+                  <a:srgbClr val="22282E"/>
+                </a:solidFill>
+              </a:rPr>
+              <a:t>•  Si lo acepta, captura el code enviado a tu dominio y complétalo por un token.</a:t>
+            </a:r>
+          </a:p>
+          <a:p>
+            <a:pPr>
+              <a:spcAft>
+                <a:spcPts val="600"/>
+              </a:spcAft>
+            </a:pPr>
+            <a:r>
+              <a:rPr sz="1500">
+                <a:solidFill>
+                  <a:srgbClr val="22282E"/>
+                </a:solidFill>
+              </a:rPr>
+              <a:t>•  Comprueba la presencia del parámetro state; si falta, monta un CSRF que vincule la cuenta del atacante.</a:t>
+            </a:r>
+          </a:p>
+          <a:p>
+            <a:pPr>
+              <a:spcAft>
+                <a:spcPts val="600"/>
+              </a:spcAft>
+            </a:pPr>
+            <a:r>
+              <a:rPr sz="1500">
+                <a:solidFill>
+                  <a:srgbClr val="22282E"/>
+                </a:solidFill>
+              </a:rPr>
+              <a:t>•  Analiza los scopes solicitados: ¿se puede pedir más de lo autorizado?</a:t>
+            </a:r>
+          </a:p>
+          <a:p>
+            <a:pPr>
+              <a:spcAft>
+                <a:spcPts val="600"/>
+              </a:spcAft>
+            </a:pPr>
+            <a:r>
+              <a:rPr sz="1500">
+                <a:solidFill>
+                  <a:srgbClr val="22282E"/>
+                </a:solidFill>
+              </a:rPr>
+              <a:t>•  En OIDC, inspecciona el idtoken (es un JWT): aplica lo aprendido en la clase 103.</a:t>
+            </a:r>
+          </a:p>
+          <a:p>
+            <a:pPr>
+              <a:spcAft>
+                <a:spcPts val="600"/>
+              </a:spcAft>
+            </a:pPr>
+            <a:r>
+              <a:rPr sz="1500">
+                <a:solidFill>
+                  <a:srgbClr val="22282E"/>
+                </a:solidFill>
+              </a:rPr>
+              <a:t>•  Documenta el flujo, el fallo y el impacto (account takeover).</a:t>
             </a:r>
           </a:p>
         </p:txBody>
